--- a/docs/presentacion-presto.pptx
+++ b/docs/presentacion-presto.pptx
@@ -4430,45 +4430,6 @@
         </p:nvSpPr>
         <p:spPr>
           <a:xfrm>
-            <a:off x="1874519" y="932688"/>
-            <a:ext cx="7315200" cy="868680"/>
-          </a:xfrm>
-          <a:prstGeom prst="rect">
-            <a:avLst/>
-          </a:prstGeom>
-          <a:noFill/>
-        </p:spPr>
-        <p:txBody>
-          <a:bodyPr wrap="square" anchor="t" lIns="0" rIns="0" tIns="0" bIns="0">
-            <a:spAutoFit/>
-          </a:bodyPr>
-          <a:lstStyle/>
-          <a:p>
-            <a:pPr algn="l">
-              <a:lnSpc>
-                <a:spcPct val="100000"/>
-              </a:lnSpc>
-            </a:pPr>
-            <a:r>
-              <a:rPr sz="5800" b="1">
-                <a:solidFill>
-                  <a:srgbClr val="FFFFFF"/>
-                </a:solidFill>
-                <a:latin typeface="Segoe UI"/>
-              </a:rPr>
-              <a:t>Presto</a:t>
-            </a:r>
-          </a:p>
-        </p:txBody>
-      </p:sp>
-      <p:sp>
-        <p:nvSpPr>
-          <p:cNvPr id="4" name="TextBox 3"/>
-          <p:cNvSpPr txBox="1"/>
-          <p:nvPr/>
-        </p:nvSpPr>
-        <p:spPr>
-          <a:xfrm>
             <a:off x="1920240" y="1828800"/>
             <a:ext cx="8778240" cy="731520"/>
           </a:xfrm>
@@ -4496,6 +4457,50 @@
                 <a:latin typeface="Segoe UI"/>
               </a:rPr>
               <a:t>Finanzas e inversiones entre personas, en pesos y dólares.</a:t>
+            </a:r>
+          </a:p>
+        </p:txBody>
+      </p:sp>
+      <p:sp>
+        <p:nvSpPr>
+          <p:cNvPr id="4" name="TextBox 3"/>
+          <p:cNvSpPr txBox="1"/>
+          <p:nvPr/>
+        </p:nvSpPr>
+        <p:spPr>
+          <a:xfrm>
+            <a:off x="1874519" y="932688"/>
+            <a:ext cx="7772400" cy="960120"/>
+          </a:xfrm>
+          <a:prstGeom prst="rect">
+            <a:avLst/>
+          </a:prstGeom>
+          <a:noFill/>
+        </p:spPr>
+        <p:txBody>
+          <a:bodyPr wrap="square" lIns="0" rIns="0" tIns="0" bIns="0">
+            <a:spAutoFit/>
+          </a:bodyPr>
+          <a:lstStyle/>
+          <a:p>
+            <a:pPr algn="l"/>
+            <a:r>
+              <a:rPr sz="5800" b="1">
+                <a:solidFill>
+                  <a:srgbClr val="FFFFFF"/>
+                </a:solidFill>
+                <a:latin typeface="Segoe UI"/>
+              </a:rPr>
+              <a:t>Presto</a:t>
+            </a:r>
+            <a:r>
+              <a:rPr sz="5800" b="1">
+                <a:solidFill>
+                  <a:srgbClr val="93C5FD"/>
+                </a:solidFill>
+                <a:latin typeface="Segoe UI"/>
+              </a:rPr>
+              <a:t>.</a:t>
             </a:r>
           </a:p>
         </p:txBody>
@@ -6802,7 +6807,7 @@
         <p:spPr>
           <a:xfrm>
             <a:off x="777240" y="1097280"/>
-            <a:ext cx="10789920" cy="822960"/>
+            <a:ext cx="7772400" cy="960120"/>
           </a:xfrm>
           <a:prstGeom prst="rect">
             <a:avLst/>
@@ -6810,16 +6815,12 @@
           <a:noFill/>
         </p:spPr>
         <p:txBody>
-          <a:bodyPr wrap="square" anchor="t" lIns="0" rIns="0" tIns="0" bIns="0">
+          <a:bodyPr wrap="square" lIns="0" rIns="0" tIns="0" bIns="0">
             <a:spAutoFit/>
           </a:bodyPr>
           <a:lstStyle/>
           <a:p>
-            <a:pPr algn="l">
-              <a:lnSpc>
-                <a:spcPct val="100000"/>
-              </a:lnSpc>
-            </a:pPr>
+            <a:pPr algn="l"/>
             <a:r>
               <a:rPr sz="5600" b="1">
                 <a:solidFill>
@@ -6828,6 +6829,15 @@
                 <a:latin typeface="Segoe UI"/>
               </a:rPr>
               <a:t>Presto</a:t>
+            </a:r>
+            <a:r>
+              <a:rPr sz="5600" b="1">
+                <a:solidFill>
+                  <a:srgbClr val="93C5FD"/>
+                </a:solidFill>
+                <a:latin typeface="Segoe UI"/>
+              </a:rPr>
+              <a:t>.</a:t>
             </a:r>
           </a:p>
         </p:txBody>

--- a/docs/presentacion-presto.pptx
+++ b/docs/presentacion-presto.pptx
@@ -4368,60 +4368,30 @@
         <p:nvPr/>
       </p:nvGrpSpPr>
       <p:grpSpPr/>
-      <p:sp>
-        <p:nvSpPr>
-          <p:cNvPr id="2" name="Rounded Rectangle 1"/>
-          <p:cNvSpPr/>
-          <p:nvPr/>
-        </p:nvSpPr>
-        <p:spPr>
-          <a:xfrm>
-            <a:off x="777240" y="914400"/>
-            <a:ext cx="868680" cy="868680"/>
-          </a:xfrm>
-          <a:prstGeom prst="roundRect">
-            <a:avLst>
-              <a:gd name="adj" fmla="val 8000"/>
-            </a:avLst>
-          </a:prstGeom>
-          <a:solidFill>
-            <a:srgbClr val="465FFF"/>
-          </a:solidFill>
-          <a:ln>
-            <a:noFill/>
-          </a:ln>
-        </p:spPr>
-        <p:style>
-          <a:lnRef idx="1">
-            <a:schemeClr val="accent1"/>
-          </a:lnRef>
-          <a:fillRef idx="3">
-            <a:schemeClr val="accent1"/>
-          </a:fillRef>
-          <a:effectRef idx="2">
-            <a:schemeClr val="accent1"/>
-          </a:effectRef>
-          <a:fontRef idx="minor">
-            <a:schemeClr val="lt1"/>
-          </a:fontRef>
-        </p:style>
-        <p:txBody>
-          <a:bodyPr rtlCol="0" anchor="ctr" wrap="square"/>
-          <a:lstStyle/>
-          <a:p>
-            <a:pPr algn="ctr"/>
-            <a:r>
-              <a:rPr sz="4000" b="1">
-                <a:solidFill>
-                  <a:srgbClr val="FFFFFF"/>
-                </a:solidFill>
-                <a:latin typeface="Segoe UI"/>
-              </a:rPr>
-              <a:t>P</a:t>
-            </a:r>
-          </a:p>
-        </p:txBody>
-      </p:sp>
+      <p:pic>
+        <p:nvPicPr>
+          <p:cNvPr id="2" name="Picture 1" descr="presto-logo.png"/>
+          <p:cNvPicPr>
+            <a:picLocks noChangeAspect="1"/>
+          </p:cNvPicPr>
+          <p:nvPr/>
+        </p:nvPicPr>
+        <p:blipFill>
+          <a:blip r:embed="rId2"/>
+          <a:stretch>
+            <a:fillRect/>
+          </a:stretch>
+        </p:blipFill>
+        <p:spPr>
+          <a:xfrm>
+            <a:off x="777240" y="868680"/>
+            <a:ext cx="960120" cy="960120"/>
+          </a:xfrm>
+          <a:prstGeom prst="rect">
+            <a:avLst/>
+          </a:prstGeom>
+        </p:spPr>
+      </p:pic>
       <p:sp>
         <p:nvSpPr>
           <p:cNvPr id="3" name="TextBox 2"/>
@@ -4702,15 +4672,39 @@
         <p:nvPr/>
       </p:nvGrpSpPr>
       <p:grpSpPr/>
-      <p:sp>
-        <p:nvSpPr>
-          <p:cNvPr id="2" name="TextBox 1"/>
+      <p:pic>
+        <p:nvPicPr>
+          <p:cNvPr id="2" name="Picture 1" descr="presto-logo.png"/>
+          <p:cNvPicPr>
+            <a:picLocks noChangeAspect="1"/>
+          </p:cNvPicPr>
+          <p:nvPr/>
+        </p:nvPicPr>
+        <p:blipFill>
+          <a:blip r:embed="rId2"/>
+          <a:stretch>
+            <a:fillRect/>
+          </a:stretch>
+        </p:blipFill>
+        <p:spPr>
+          <a:xfrm>
+            <a:off x="502920" y="182880"/>
+            <a:ext cx="420624" cy="420624"/>
+          </a:xfrm>
+          <a:prstGeom prst="rect">
+            <a:avLst/>
+          </a:prstGeom>
+        </p:spPr>
+      </p:pic>
+      <p:sp>
+        <p:nvSpPr>
+          <p:cNvPr id="3" name="TextBox 2"/>
           <p:cNvSpPr txBox="1"/>
           <p:nvPr/>
         </p:nvSpPr>
         <p:spPr>
           <a:xfrm>
-            <a:off x="502920" y="301752"/>
+            <a:off x="1024128" y="301752"/>
             <a:ext cx="2743200" cy="228600"/>
           </a:xfrm>
           <a:prstGeom prst="rect">
@@ -4743,7 +4737,7 @@
       </p:sp>
       <p:sp>
         <p:nvSpPr>
-          <p:cNvPr id="3" name="TextBox 2"/>
+          <p:cNvPr id="4" name="TextBox 3"/>
           <p:cNvSpPr txBox="1"/>
           <p:nvPr/>
         </p:nvSpPr>
@@ -4782,7 +4776,7 @@
       </p:sp>
       <p:sp>
         <p:nvSpPr>
-          <p:cNvPr id="4" name="TextBox 3"/>
+          <p:cNvPr id="5" name="TextBox 4"/>
           <p:cNvSpPr txBox="1"/>
           <p:nvPr/>
         </p:nvSpPr>
@@ -4821,7 +4815,7 @@
       </p:sp>
       <p:sp>
         <p:nvSpPr>
-          <p:cNvPr id="5" name="Rectangle 4"/>
+          <p:cNvPr id="6" name="Rectangle 5"/>
           <p:cNvSpPr/>
           <p:nvPr/>
         </p:nvSpPr>
@@ -4864,7 +4858,7 @@
       </p:sp>
       <p:sp>
         <p:nvSpPr>
-          <p:cNvPr id="6" name="TextBox 5"/>
+          <p:cNvPr id="7" name="TextBox 6"/>
           <p:cNvSpPr txBox="1"/>
           <p:nvPr/>
         </p:nvSpPr>
@@ -4903,7 +4897,7 @@
       </p:sp>
       <p:sp>
         <p:nvSpPr>
-          <p:cNvPr id="7" name="TextBox 6"/>
+          <p:cNvPr id="8" name="TextBox 7"/>
           <p:cNvSpPr txBox="1"/>
           <p:nvPr/>
         </p:nvSpPr>
@@ -4942,7 +4936,7 @@
       </p:sp>
       <p:sp>
         <p:nvSpPr>
-          <p:cNvPr id="8" name="Rounded Rectangle 7"/>
+          <p:cNvPr id="9" name="Rounded Rectangle 8"/>
           <p:cNvSpPr/>
           <p:nvPr/>
         </p:nvSpPr>
@@ -5018,7 +5012,7 @@
       </p:sp>
       <p:sp>
         <p:nvSpPr>
-          <p:cNvPr id="9" name="Rounded Rectangle 8"/>
+          <p:cNvPr id="10" name="Rounded Rectangle 9"/>
           <p:cNvSpPr/>
           <p:nvPr/>
         </p:nvSpPr>
@@ -5094,7 +5088,7 @@
       </p:sp>
       <p:sp>
         <p:nvSpPr>
-          <p:cNvPr id="10" name="Rounded Rectangle 9"/>
+          <p:cNvPr id="11" name="Rounded Rectangle 10"/>
           <p:cNvSpPr/>
           <p:nvPr/>
         </p:nvSpPr>
@@ -5170,7 +5164,7 @@
       </p:sp>
       <p:sp>
         <p:nvSpPr>
-          <p:cNvPr id="11" name="Rounded Rectangle 10"/>
+          <p:cNvPr id="12" name="Rounded Rectangle 11"/>
           <p:cNvSpPr/>
           <p:nvPr/>
         </p:nvSpPr>
@@ -5246,7 +5240,7 @@
       </p:sp>
       <p:sp>
         <p:nvSpPr>
-          <p:cNvPr id="12" name="Rounded Rectangle 11"/>
+          <p:cNvPr id="13" name="Rounded Rectangle 12"/>
           <p:cNvSpPr/>
           <p:nvPr/>
         </p:nvSpPr>
@@ -5322,7 +5316,7 @@
       </p:sp>
       <p:sp>
         <p:nvSpPr>
-          <p:cNvPr id="13" name="Rounded Rectangle 12"/>
+          <p:cNvPr id="14" name="Rounded Rectangle 13"/>
           <p:cNvSpPr/>
           <p:nvPr/>
         </p:nvSpPr>
@@ -5400,15 +5394,39 @@
         <p:nvPr/>
       </p:nvGrpSpPr>
       <p:grpSpPr/>
-      <p:sp>
-        <p:nvSpPr>
-          <p:cNvPr id="2" name="TextBox 1"/>
+      <p:pic>
+        <p:nvPicPr>
+          <p:cNvPr id="2" name="Picture 1" descr="presto-logo.png"/>
+          <p:cNvPicPr>
+            <a:picLocks noChangeAspect="1"/>
+          </p:cNvPicPr>
+          <p:nvPr/>
+        </p:nvPicPr>
+        <p:blipFill>
+          <a:blip r:embed="rId2"/>
+          <a:stretch>
+            <a:fillRect/>
+          </a:stretch>
+        </p:blipFill>
+        <p:spPr>
+          <a:xfrm>
+            <a:off x="502920" y="182880"/>
+            <a:ext cx="420624" cy="420624"/>
+          </a:xfrm>
+          <a:prstGeom prst="rect">
+            <a:avLst/>
+          </a:prstGeom>
+        </p:spPr>
+      </p:pic>
+      <p:sp>
+        <p:nvSpPr>
+          <p:cNvPr id="3" name="TextBox 2"/>
           <p:cNvSpPr txBox="1"/>
           <p:nvPr/>
         </p:nvSpPr>
         <p:spPr>
           <a:xfrm>
-            <a:off x="502920" y="301752"/>
+            <a:off x="1024128" y="301752"/>
             <a:ext cx="2743200" cy="228600"/>
           </a:xfrm>
           <a:prstGeom prst="rect">
@@ -5441,7 +5459,7 @@
       </p:sp>
       <p:sp>
         <p:nvSpPr>
-          <p:cNvPr id="3" name="TextBox 2"/>
+          <p:cNvPr id="4" name="TextBox 3"/>
           <p:cNvSpPr txBox="1"/>
           <p:nvPr/>
         </p:nvSpPr>
@@ -5480,7 +5498,7 @@
       </p:sp>
       <p:sp>
         <p:nvSpPr>
-          <p:cNvPr id="4" name="TextBox 3"/>
+          <p:cNvPr id="5" name="TextBox 4"/>
           <p:cNvSpPr txBox="1"/>
           <p:nvPr/>
         </p:nvSpPr>
@@ -5519,7 +5537,7 @@
       </p:sp>
       <p:sp>
         <p:nvSpPr>
-          <p:cNvPr id="5" name="Rectangle 4"/>
+          <p:cNvPr id="6" name="Rectangle 5"/>
           <p:cNvSpPr/>
           <p:nvPr/>
         </p:nvSpPr>
@@ -5562,7 +5580,7 @@
       </p:sp>
       <p:sp>
         <p:nvSpPr>
-          <p:cNvPr id="6" name="TextBox 5"/>
+          <p:cNvPr id="7" name="TextBox 6"/>
           <p:cNvSpPr txBox="1"/>
           <p:nvPr/>
         </p:nvSpPr>
@@ -5601,7 +5619,7 @@
       </p:sp>
       <p:sp>
         <p:nvSpPr>
-          <p:cNvPr id="7" name="TextBox 6"/>
+          <p:cNvPr id="8" name="TextBox 7"/>
           <p:cNvSpPr txBox="1"/>
           <p:nvPr/>
         </p:nvSpPr>
@@ -5640,7 +5658,7 @@
       </p:sp>
       <p:sp>
         <p:nvSpPr>
-          <p:cNvPr id="8" name="Rounded Rectangle 7"/>
+          <p:cNvPr id="9" name="Rounded Rectangle 8"/>
           <p:cNvSpPr/>
           <p:nvPr/>
         </p:nvSpPr>
@@ -5708,7 +5726,7 @@
       </p:sp>
       <p:sp>
         <p:nvSpPr>
-          <p:cNvPr id="9" name="Rounded Rectangle 8"/>
+          <p:cNvPr id="10" name="Rounded Rectangle 9"/>
           <p:cNvSpPr/>
           <p:nvPr/>
         </p:nvSpPr>
@@ -5776,7 +5794,7 @@
       </p:sp>
       <p:sp>
         <p:nvSpPr>
-          <p:cNvPr id="10" name="Rounded Rectangle 9"/>
+          <p:cNvPr id="11" name="Rounded Rectangle 10"/>
           <p:cNvSpPr/>
           <p:nvPr/>
         </p:nvSpPr>
@@ -5844,7 +5862,7 @@
       </p:sp>
       <p:sp>
         <p:nvSpPr>
-          <p:cNvPr id="11" name="Rounded Rectangle 10"/>
+          <p:cNvPr id="12" name="Rounded Rectangle 11"/>
           <p:cNvSpPr/>
           <p:nvPr/>
         </p:nvSpPr>
@@ -5912,7 +5930,7 @@
       </p:sp>
       <p:sp>
         <p:nvSpPr>
-          <p:cNvPr id="12" name="TextBox 11"/>
+          <p:cNvPr id="13" name="TextBox 12"/>
           <p:cNvSpPr txBox="1"/>
           <p:nvPr/>
         </p:nvSpPr>
@@ -5953,7 +5971,7 @@
       </p:sp>
       <p:sp>
         <p:nvSpPr>
-          <p:cNvPr id="13" name="Rounded Rectangle 12"/>
+          <p:cNvPr id="14" name="Rounded Rectangle 13"/>
           <p:cNvSpPr/>
           <p:nvPr/>
         </p:nvSpPr>
@@ -6031,15 +6049,39 @@
         <p:nvPr/>
       </p:nvGrpSpPr>
       <p:grpSpPr/>
-      <p:sp>
-        <p:nvSpPr>
-          <p:cNvPr id="2" name="TextBox 1"/>
+      <p:pic>
+        <p:nvPicPr>
+          <p:cNvPr id="2" name="Picture 1" descr="presto-logo.png"/>
+          <p:cNvPicPr>
+            <a:picLocks noChangeAspect="1"/>
+          </p:cNvPicPr>
+          <p:nvPr/>
+        </p:nvPicPr>
+        <p:blipFill>
+          <a:blip r:embed="rId2"/>
+          <a:stretch>
+            <a:fillRect/>
+          </a:stretch>
+        </p:blipFill>
+        <p:spPr>
+          <a:xfrm>
+            <a:off x="502920" y="182880"/>
+            <a:ext cx="420624" cy="420624"/>
+          </a:xfrm>
+          <a:prstGeom prst="rect">
+            <a:avLst/>
+          </a:prstGeom>
+        </p:spPr>
+      </p:pic>
+      <p:sp>
+        <p:nvSpPr>
+          <p:cNvPr id="3" name="TextBox 2"/>
           <p:cNvSpPr txBox="1"/>
           <p:nvPr/>
         </p:nvSpPr>
         <p:spPr>
           <a:xfrm>
-            <a:off x="502920" y="301752"/>
+            <a:off x="1024128" y="301752"/>
             <a:ext cx="2743200" cy="228600"/>
           </a:xfrm>
           <a:prstGeom prst="rect">
@@ -6072,7 +6114,7 @@
       </p:sp>
       <p:sp>
         <p:nvSpPr>
-          <p:cNvPr id="3" name="TextBox 2"/>
+          <p:cNvPr id="4" name="TextBox 3"/>
           <p:cNvSpPr txBox="1"/>
           <p:nvPr/>
         </p:nvSpPr>
@@ -6111,7 +6153,7 @@
       </p:sp>
       <p:sp>
         <p:nvSpPr>
-          <p:cNvPr id="4" name="TextBox 3"/>
+          <p:cNvPr id="5" name="TextBox 4"/>
           <p:cNvSpPr txBox="1"/>
           <p:nvPr/>
         </p:nvSpPr>
@@ -6150,7 +6192,7 @@
       </p:sp>
       <p:sp>
         <p:nvSpPr>
-          <p:cNvPr id="5" name="Rectangle 4"/>
+          <p:cNvPr id="6" name="Rectangle 5"/>
           <p:cNvSpPr/>
           <p:nvPr/>
         </p:nvSpPr>
@@ -6193,7 +6235,7 @@
       </p:sp>
       <p:sp>
         <p:nvSpPr>
-          <p:cNvPr id="6" name="TextBox 5"/>
+          <p:cNvPr id="7" name="TextBox 6"/>
           <p:cNvSpPr txBox="1"/>
           <p:nvPr/>
         </p:nvSpPr>
@@ -6232,7 +6274,7 @@
       </p:sp>
       <p:sp>
         <p:nvSpPr>
-          <p:cNvPr id="7" name="TextBox 6"/>
+          <p:cNvPr id="8" name="TextBox 7"/>
           <p:cNvSpPr txBox="1"/>
           <p:nvPr/>
         </p:nvSpPr>
@@ -6271,7 +6313,7 @@
       </p:sp>
       <p:sp>
         <p:nvSpPr>
-          <p:cNvPr id="8" name="Rounded Rectangle 7"/>
+          <p:cNvPr id="9" name="Rounded Rectangle 8"/>
           <p:cNvSpPr/>
           <p:nvPr/>
         </p:nvSpPr>
@@ -6354,7 +6396,7 @@
       </p:sp>
       <p:sp>
         <p:nvSpPr>
-          <p:cNvPr id="9" name="TextBox 8"/>
+          <p:cNvPr id="10" name="TextBox 9"/>
           <p:cNvSpPr txBox="1"/>
           <p:nvPr/>
         </p:nvSpPr>
@@ -6393,7 +6435,7 @@
       </p:sp>
       <p:sp>
         <p:nvSpPr>
-          <p:cNvPr id="10" name="Rounded Rectangle 9"/>
+          <p:cNvPr id="11" name="Rounded Rectangle 10"/>
           <p:cNvSpPr/>
           <p:nvPr/>
         </p:nvSpPr>
@@ -6476,7 +6518,7 @@
       </p:sp>
       <p:sp>
         <p:nvSpPr>
-          <p:cNvPr id="11" name="TextBox 10"/>
+          <p:cNvPr id="12" name="TextBox 11"/>
           <p:cNvSpPr txBox="1"/>
           <p:nvPr/>
         </p:nvSpPr>
@@ -6515,7 +6557,7 @@
       </p:sp>
       <p:sp>
         <p:nvSpPr>
-          <p:cNvPr id="12" name="Rounded Rectangle 11"/>
+          <p:cNvPr id="13" name="Rounded Rectangle 12"/>
           <p:cNvSpPr/>
           <p:nvPr/>
         </p:nvSpPr>
@@ -6598,7 +6640,7 @@
       </p:sp>
       <p:sp>
         <p:nvSpPr>
-          <p:cNvPr id="13" name="TextBox 12"/>
+          <p:cNvPr id="14" name="TextBox 13"/>
           <p:cNvSpPr txBox="1"/>
           <p:nvPr/>
         </p:nvSpPr>
@@ -6637,7 +6679,7 @@
       </p:sp>
       <p:sp>
         <p:nvSpPr>
-          <p:cNvPr id="14" name="Rounded Rectangle 13"/>
+          <p:cNvPr id="15" name="Rounded Rectangle 14"/>
           <p:cNvSpPr/>
           <p:nvPr/>
         </p:nvSpPr>
@@ -6720,7 +6762,7 @@
       </p:sp>
       <p:sp>
         <p:nvSpPr>
-          <p:cNvPr id="15" name="Rounded Rectangle 14"/>
+          <p:cNvPr id="16" name="Rounded Rectangle 15"/>
           <p:cNvSpPr/>
           <p:nvPr/>
         </p:nvSpPr>
@@ -6798,50 +6840,30 @@
         <p:nvPr/>
       </p:nvGrpSpPr>
       <p:grpSpPr/>
-      <p:sp>
-        <p:nvSpPr>
-          <p:cNvPr id="2" name="TextBox 1"/>
-          <p:cNvSpPr txBox="1"/>
-          <p:nvPr/>
-        </p:nvSpPr>
-        <p:spPr>
-          <a:xfrm>
-            <a:off x="777240" y="1097280"/>
-            <a:ext cx="7772400" cy="960120"/>
+      <p:pic>
+        <p:nvPicPr>
+          <p:cNvPr id="2" name="Picture 1" descr="presto-logo.png"/>
+          <p:cNvPicPr>
+            <a:picLocks noChangeAspect="1"/>
+          </p:cNvPicPr>
+          <p:nvPr/>
+        </p:nvPicPr>
+        <p:blipFill>
+          <a:blip r:embed="rId2"/>
+          <a:stretch>
+            <a:fillRect/>
+          </a:stretch>
+        </p:blipFill>
+        <p:spPr>
+          <a:xfrm>
+            <a:off x="777240" y="777240"/>
+            <a:ext cx="1143000" cy="1143000"/>
           </a:xfrm>
           <a:prstGeom prst="rect">
             <a:avLst/>
           </a:prstGeom>
-          <a:noFill/>
-        </p:spPr>
-        <p:txBody>
-          <a:bodyPr wrap="square" lIns="0" rIns="0" tIns="0" bIns="0">
-            <a:spAutoFit/>
-          </a:bodyPr>
-          <a:lstStyle/>
-          <a:p>
-            <a:pPr algn="l"/>
-            <a:r>
-              <a:rPr sz="5600" b="1">
-                <a:solidFill>
-                  <a:srgbClr val="FFFFFF"/>
-                </a:solidFill>
-                <a:latin typeface="Segoe UI"/>
-              </a:rPr>
-              <a:t>Presto</a:t>
-            </a:r>
-            <a:r>
-              <a:rPr sz="5600" b="1">
-                <a:solidFill>
-                  <a:srgbClr val="93C5FD"/>
-                </a:solidFill>
-                <a:latin typeface="Segoe UI"/>
-              </a:rPr>
-              <a:t>.</a:t>
-            </a:r>
-          </a:p>
-        </p:txBody>
-      </p:sp>
+        </p:spPr>
+      </p:pic>
       <p:sp>
         <p:nvSpPr>
           <p:cNvPr id="3" name="TextBox 2"/>
@@ -6851,7 +6873,7 @@
         <p:spPr>
           <a:xfrm>
             <a:off x="777240" y="1965960"/>
-            <a:ext cx="10789920" cy="640080"/>
+            <a:ext cx="10789920" cy="822960"/>
           </a:xfrm>
           <a:prstGeom prst="rect">
             <a:avLst/>
@@ -6870,13 +6892,13 @@
               </a:lnSpc>
             </a:pPr>
             <a:r>
-              <a:rPr sz="2600" b="0">
-                <a:solidFill>
-                  <a:srgbClr val="DDE9FF"/>
-                </a:solidFill>
-                <a:latin typeface="Segoe UI"/>
-              </a:rPr>
-              <a:t>Menos fricción, más claridad.</a:t>
+              <a:rPr sz="5600" b="1">
+                <a:solidFill>
+                  <a:srgbClr val="FFFFFF"/>
+                </a:solidFill>
+                <a:latin typeface="Segoe UI"/>
+              </a:rPr>
+              <a:t>Presto</a:t>
             </a:r>
           </a:p>
         </p:txBody>
@@ -6889,8 +6911,8 @@
         </p:nvSpPr>
         <p:spPr>
           <a:xfrm>
-            <a:off x="777240" y="3063240"/>
-            <a:ext cx="10789920" cy="320040"/>
+            <a:off x="777240" y="2788920"/>
+            <a:ext cx="10789920" cy="640080"/>
           </a:xfrm>
           <a:prstGeom prst="rect">
             <a:avLst/>
@@ -6909,6 +6931,45 @@
               </a:lnSpc>
             </a:pPr>
             <a:r>
+              <a:rPr sz="2600" b="0">
+                <a:solidFill>
+                  <a:srgbClr val="DDE9FF"/>
+                </a:solidFill>
+                <a:latin typeface="Segoe UI"/>
+              </a:rPr>
+              <a:t>Menos fricción, más claridad.</a:t>
+            </a:r>
+          </a:p>
+        </p:txBody>
+      </p:sp>
+      <p:sp>
+        <p:nvSpPr>
+          <p:cNvPr id="5" name="TextBox 4"/>
+          <p:cNvSpPr txBox="1"/>
+          <p:nvPr/>
+        </p:nvSpPr>
+        <p:spPr>
+          <a:xfrm>
+            <a:off x="777240" y="3063240"/>
+            <a:ext cx="10789920" cy="320040"/>
+          </a:xfrm>
+          <a:prstGeom prst="rect">
+            <a:avLst/>
+          </a:prstGeom>
+          <a:noFill/>
+        </p:spPr>
+        <p:txBody>
+          <a:bodyPr wrap="square" anchor="t" lIns="0" rIns="0" tIns="0" bIns="0">
+            <a:spAutoFit/>
+          </a:bodyPr>
+          <a:lstStyle/>
+          <a:p>
+            <a:pPr algn="l">
+              <a:lnSpc>
+                <a:spcPct val="100000"/>
+              </a:lnSpc>
+            </a:pPr>
+            <a:r>
               <a:rPr sz="1500" b="1">
                 <a:solidFill>
                   <a:srgbClr val="FFFFFF"/>
@@ -6922,7 +6983,7 @@
       </p:sp>
       <p:sp>
         <p:nvSpPr>
-          <p:cNvPr id="5" name="TextBox 4"/>
+          <p:cNvPr id="6" name="TextBox 5"/>
           <p:cNvSpPr txBox="1"/>
           <p:nvPr/>
         </p:nvSpPr>
@@ -6961,7 +7022,7 @@
       </p:sp>
       <p:sp>
         <p:nvSpPr>
-          <p:cNvPr id="6" name="TextBox 5"/>
+          <p:cNvPr id="7" name="TextBox 6"/>
           <p:cNvSpPr txBox="1"/>
           <p:nvPr/>
         </p:nvSpPr>
@@ -7024,15 +7085,39 @@
         <p:nvPr/>
       </p:nvGrpSpPr>
       <p:grpSpPr/>
-      <p:sp>
-        <p:nvSpPr>
-          <p:cNvPr id="2" name="TextBox 1"/>
+      <p:pic>
+        <p:nvPicPr>
+          <p:cNvPr id="2" name="Picture 1" descr="presto-logo.png"/>
+          <p:cNvPicPr>
+            <a:picLocks noChangeAspect="1"/>
+          </p:cNvPicPr>
+          <p:nvPr/>
+        </p:nvPicPr>
+        <p:blipFill>
+          <a:blip r:embed="rId2"/>
+          <a:stretch>
+            <a:fillRect/>
+          </a:stretch>
+        </p:blipFill>
+        <p:spPr>
+          <a:xfrm>
+            <a:off x="502920" y="182880"/>
+            <a:ext cx="420624" cy="420624"/>
+          </a:xfrm>
+          <a:prstGeom prst="rect">
+            <a:avLst/>
+          </a:prstGeom>
+        </p:spPr>
+      </p:pic>
+      <p:sp>
+        <p:nvSpPr>
+          <p:cNvPr id="3" name="TextBox 2"/>
           <p:cNvSpPr txBox="1"/>
           <p:nvPr/>
         </p:nvSpPr>
         <p:spPr>
           <a:xfrm>
-            <a:off x="502920" y="301752"/>
+            <a:off x="1024128" y="301752"/>
             <a:ext cx="2743200" cy="228600"/>
           </a:xfrm>
           <a:prstGeom prst="rect">
@@ -7065,7 +7150,7 @@
       </p:sp>
       <p:sp>
         <p:nvSpPr>
-          <p:cNvPr id="3" name="TextBox 2"/>
+          <p:cNvPr id="4" name="TextBox 3"/>
           <p:cNvSpPr txBox="1"/>
           <p:nvPr/>
         </p:nvSpPr>
@@ -7104,7 +7189,7 @@
       </p:sp>
       <p:sp>
         <p:nvSpPr>
-          <p:cNvPr id="4" name="TextBox 3"/>
+          <p:cNvPr id="5" name="TextBox 4"/>
           <p:cNvSpPr txBox="1"/>
           <p:nvPr/>
         </p:nvSpPr>
@@ -7143,7 +7228,7 @@
       </p:sp>
       <p:sp>
         <p:nvSpPr>
-          <p:cNvPr id="5" name="Rectangle 4"/>
+          <p:cNvPr id="6" name="Rectangle 5"/>
           <p:cNvSpPr/>
           <p:nvPr/>
         </p:nvSpPr>
@@ -7186,7 +7271,7 @@
       </p:sp>
       <p:sp>
         <p:nvSpPr>
-          <p:cNvPr id="6" name="TextBox 5"/>
+          <p:cNvPr id="7" name="TextBox 6"/>
           <p:cNvSpPr txBox="1"/>
           <p:nvPr/>
         </p:nvSpPr>
@@ -7225,7 +7310,7 @@
       </p:sp>
       <p:sp>
         <p:nvSpPr>
-          <p:cNvPr id="7" name="TextBox 6"/>
+          <p:cNvPr id="8" name="TextBox 7"/>
           <p:cNvSpPr txBox="1"/>
           <p:nvPr/>
         </p:nvSpPr>
@@ -7264,7 +7349,7 @@
       </p:sp>
       <p:sp>
         <p:nvSpPr>
-          <p:cNvPr id="8" name="TextBox 7"/>
+          <p:cNvPr id="9" name="TextBox 8"/>
           <p:cNvSpPr txBox="1"/>
           <p:nvPr/>
         </p:nvSpPr>
@@ -7306,7 +7391,7 @@
       </p:sp>
       <p:sp>
         <p:nvSpPr>
-          <p:cNvPr id="9" name="Rounded Rectangle 8"/>
+          <p:cNvPr id="10" name="Rounded Rectangle 9"/>
           <p:cNvSpPr/>
           <p:nvPr/>
         </p:nvSpPr>
@@ -7384,15 +7469,39 @@
         <p:nvPr/>
       </p:nvGrpSpPr>
       <p:grpSpPr/>
-      <p:sp>
-        <p:nvSpPr>
-          <p:cNvPr id="2" name="TextBox 1"/>
+      <p:pic>
+        <p:nvPicPr>
+          <p:cNvPr id="2" name="Picture 1" descr="presto-logo.png"/>
+          <p:cNvPicPr>
+            <a:picLocks noChangeAspect="1"/>
+          </p:cNvPicPr>
+          <p:nvPr/>
+        </p:nvPicPr>
+        <p:blipFill>
+          <a:blip r:embed="rId2"/>
+          <a:stretch>
+            <a:fillRect/>
+          </a:stretch>
+        </p:blipFill>
+        <p:spPr>
+          <a:xfrm>
+            <a:off x="502920" y="182880"/>
+            <a:ext cx="420624" cy="420624"/>
+          </a:xfrm>
+          <a:prstGeom prst="rect">
+            <a:avLst/>
+          </a:prstGeom>
+        </p:spPr>
+      </p:pic>
+      <p:sp>
+        <p:nvSpPr>
+          <p:cNvPr id="3" name="TextBox 2"/>
           <p:cNvSpPr txBox="1"/>
           <p:nvPr/>
         </p:nvSpPr>
         <p:spPr>
           <a:xfrm>
-            <a:off x="502920" y="301752"/>
+            <a:off x="1024128" y="301752"/>
             <a:ext cx="2743200" cy="228600"/>
           </a:xfrm>
           <a:prstGeom prst="rect">
@@ -7425,7 +7534,7 @@
       </p:sp>
       <p:sp>
         <p:nvSpPr>
-          <p:cNvPr id="3" name="TextBox 2"/>
+          <p:cNvPr id="4" name="TextBox 3"/>
           <p:cNvSpPr txBox="1"/>
           <p:nvPr/>
         </p:nvSpPr>
@@ -7464,7 +7573,7 @@
       </p:sp>
       <p:sp>
         <p:nvSpPr>
-          <p:cNvPr id="4" name="TextBox 3"/>
+          <p:cNvPr id="5" name="TextBox 4"/>
           <p:cNvSpPr txBox="1"/>
           <p:nvPr/>
         </p:nvSpPr>
@@ -7503,7 +7612,7 @@
       </p:sp>
       <p:sp>
         <p:nvSpPr>
-          <p:cNvPr id="5" name="Rectangle 4"/>
+          <p:cNvPr id="6" name="Rectangle 5"/>
           <p:cNvSpPr/>
           <p:nvPr/>
         </p:nvSpPr>
@@ -7546,7 +7655,7 @@
       </p:sp>
       <p:sp>
         <p:nvSpPr>
-          <p:cNvPr id="6" name="TextBox 5"/>
+          <p:cNvPr id="7" name="TextBox 6"/>
           <p:cNvSpPr txBox="1"/>
           <p:nvPr/>
         </p:nvSpPr>
@@ -7585,7 +7694,7 @@
       </p:sp>
       <p:sp>
         <p:nvSpPr>
-          <p:cNvPr id="7" name="TextBox 6"/>
+          <p:cNvPr id="8" name="TextBox 7"/>
           <p:cNvSpPr txBox="1"/>
           <p:nvPr/>
         </p:nvSpPr>
@@ -7624,7 +7733,7 @@
       </p:sp>
       <p:sp>
         <p:nvSpPr>
-          <p:cNvPr id="8" name="TextBox 7"/>
+          <p:cNvPr id="9" name="TextBox 8"/>
           <p:cNvSpPr txBox="1"/>
           <p:nvPr/>
         </p:nvSpPr>
@@ -7663,7 +7772,7 @@
       </p:sp>
       <p:sp>
         <p:nvSpPr>
-          <p:cNvPr id="9" name="Rounded Rectangle 8"/>
+          <p:cNvPr id="10" name="Rounded Rectangle 9"/>
           <p:cNvSpPr/>
           <p:nvPr/>
         </p:nvSpPr>
@@ -7739,7 +7848,7 @@
       </p:sp>
       <p:sp>
         <p:nvSpPr>
-          <p:cNvPr id="10" name="Rounded Rectangle 9"/>
+          <p:cNvPr id="11" name="Rounded Rectangle 10"/>
           <p:cNvSpPr/>
           <p:nvPr/>
         </p:nvSpPr>
@@ -7815,7 +7924,7 @@
       </p:sp>
       <p:sp>
         <p:nvSpPr>
-          <p:cNvPr id="11" name="Rounded Rectangle 10"/>
+          <p:cNvPr id="12" name="Rounded Rectangle 11"/>
           <p:cNvSpPr/>
           <p:nvPr/>
         </p:nvSpPr>
@@ -7891,7 +8000,7 @@
       </p:sp>
       <p:sp>
         <p:nvSpPr>
-          <p:cNvPr id="12" name="Rounded Rectangle 11"/>
+          <p:cNvPr id="13" name="Rounded Rectangle 12"/>
           <p:cNvSpPr/>
           <p:nvPr/>
         </p:nvSpPr>
@@ -7967,7 +8076,7 @@
       </p:sp>
       <p:sp>
         <p:nvSpPr>
-          <p:cNvPr id="13" name="Rounded Rectangle 12"/>
+          <p:cNvPr id="14" name="Rounded Rectangle 13"/>
           <p:cNvSpPr/>
           <p:nvPr/>
         </p:nvSpPr>
@@ -8045,15 +8154,39 @@
         <p:nvPr/>
       </p:nvGrpSpPr>
       <p:grpSpPr/>
-      <p:sp>
-        <p:nvSpPr>
-          <p:cNvPr id="2" name="TextBox 1"/>
+      <p:pic>
+        <p:nvPicPr>
+          <p:cNvPr id="2" name="Picture 1" descr="presto-logo.png"/>
+          <p:cNvPicPr>
+            <a:picLocks noChangeAspect="1"/>
+          </p:cNvPicPr>
+          <p:nvPr/>
+        </p:nvPicPr>
+        <p:blipFill>
+          <a:blip r:embed="rId2"/>
+          <a:stretch>
+            <a:fillRect/>
+          </a:stretch>
+        </p:blipFill>
+        <p:spPr>
+          <a:xfrm>
+            <a:off x="502920" y="182880"/>
+            <a:ext cx="420624" cy="420624"/>
+          </a:xfrm>
+          <a:prstGeom prst="rect">
+            <a:avLst/>
+          </a:prstGeom>
+        </p:spPr>
+      </p:pic>
+      <p:sp>
+        <p:nvSpPr>
+          <p:cNvPr id="3" name="TextBox 2"/>
           <p:cNvSpPr txBox="1"/>
           <p:nvPr/>
         </p:nvSpPr>
         <p:spPr>
           <a:xfrm>
-            <a:off x="502920" y="301752"/>
+            <a:off x="1024128" y="301752"/>
             <a:ext cx="2743200" cy="228600"/>
           </a:xfrm>
           <a:prstGeom prst="rect">
@@ -8086,7 +8219,7 @@
       </p:sp>
       <p:sp>
         <p:nvSpPr>
-          <p:cNvPr id="3" name="TextBox 2"/>
+          <p:cNvPr id="4" name="TextBox 3"/>
           <p:cNvSpPr txBox="1"/>
           <p:nvPr/>
         </p:nvSpPr>
@@ -8125,7 +8258,7 @@
       </p:sp>
       <p:sp>
         <p:nvSpPr>
-          <p:cNvPr id="4" name="TextBox 3"/>
+          <p:cNvPr id="5" name="TextBox 4"/>
           <p:cNvSpPr txBox="1"/>
           <p:nvPr/>
         </p:nvSpPr>
@@ -8164,7 +8297,7 @@
       </p:sp>
       <p:sp>
         <p:nvSpPr>
-          <p:cNvPr id="5" name="Rectangle 4"/>
+          <p:cNvPr id="6" name="Rectangle 5"/>
           <p:cNvSpPr/>
           <p:nvPr/>
         </p:nvSpPr>
@@ -8207,7 +8340,7 @@
       </p:sp>
       <p:sp>
         <p:nvSpPr>
-          <p:cNvPr id="6" name="TextBox 5"/>
+          <p:cNvPr id="7" name="TextBox 6"/>
           <p:cNvSpPr txBox="1"/>
           <p:nvPr/>
         </p:nvSpPr>
@@ -8246,7 +8379,7 @@
       </p:sp>
       <p:sp>
         <p:nvSpPr>
-          <p:cNvPr id="7" name="TextBox 6"/>
+          <p:cNvPr id="8" name="TextBox 7"/>
           <p:cNvSpPr txBox="1"/>
           <p:nvPr/>
         </p:nvSpPr>
@@ -8285,7 +8418,7 @@
       </p:sp>
       <p:sp>
         <p:nvSpPr>
-          <p:cNvPr id="8" name="Rounded Rectangle 7"/>
+          <p:cNvPr id="9" name="Rounded Rectangle 8"/>
           <p:cNvSpPr/>
           <p:nvPr/>
         </p:nvSpPr>
@@ -8377,7 +8510,7 @@
       </p:sp>
       <p:sp>
         <p:nvSpPr>
-          <p:cNvPr id="9" name="Rounded Rectangle 8"/>
+          <p:cNvPr id="10" name="Rounded Rectangle 9"/>
           <p:cNvSpPr/>
           <p:nvPr/>
         </p:nvSpPr>
@@ -8469,7 +8602,7 @@
       </p:sp>
       <p:sp>
         <p:nvSpPr>
-          <p:cNvPr id="10" name="Rounded Rectangle 9"/>
+          <p:cNvPr id="11" name="Rounded Rectangle 10"/>
           <p:cNvSpPr/>
           <p:nvPr/>
         </p:nvSpPr>
@@ -8561,7 +8694,7 @@
       </p:sp>
       <p:sp>
         <p:nvSpPr>
-          <p:cNvPr id="11" name="Rounded Rectangle 10"/>
+          <p:cNvPr id="12" name="Rounded Rectangle 11"/>
           <p:cNvSpPr/>
           <p:nvPr/>
         </p:nvSpPr>
@@ -8639,15 +8772,39 @@
         <p:nvPr/>
       </p:nvGrpSpPr>
       <p:grpSpPr/>
-      <p:sp>
-        <p:nvSpPr>
-          <p:cNvPr id="2" name="TextBox 1"/>
+      <p:pic>
+        <p:nvPicPr>
+          <p:cNvPr id="2" name="Picture 1" descr="presto-logo.png"/>
+          <p:cNvPicPr>
+            <a:picLocks noChangeAspect="1"/>
+          </p:cNvPicPr>
+          <p:nvPr/>
+        </p:nvPicPr>
+        <p:blipFill>
+          <a:blip r:embed="rId2"/>
+          <a:stretch>
+            <a:fillRect/>
+          </a:stretch>
+        </p:blipFill>
+        <p:spPr>
+          <a:xfrm>
+            <a:off x="502920" y="182880"/>
+            <a:ext cx="420624" cy="420624"/>
+          </a:xfrm>
+          <a:prstGeom prst="rect">
+            <a:avLst/>
+          </a:prstGeom>
+        </p:spPr>
+      </p:pic>
+      <p:sp>
+        <p:nvSpPr>
+          <p:cNvPr id="3" name="TextBox 2"/>
           <p:cNvSpPr txBox="1"/>
           <p:nvPr/>
         </p:nvSpPr>
         <p:spPr>
           <a:xfrm>
-            <a:off x="502920" y="301752"/>
+            <a:off x="1024128" y="301752"/>
             <a:ext cx="2743200" cy="228600"/>
           </a:xfrm>
           <a:prstGeom prst="rect">
@@ -8680,7 +8837,7 @@
       </p:sp>
       <p:sp>
         <p:nvSpPr>
-          <p:cNvPr id="3" name="TextBox 2"/>
+          <p:cNvPr id="4" name="TextBox 3"/>
           <p:cNvSpPr txBox="1"/>
           <p:nvPr/>
         </p:nvSpPr>
@@ -8719,7 +8876,7 @@
       </p:sp>
       <p:sp>
         <p:nvSpPr>
-          <p:cNvPr id="4" name="TextBox 3"/>
+          <p:cNvPr id="5" name="TextBox 4"/>
           <p:cNvSpPr txBox="1"/>
           <p:nvPr/>
         </p:nvSpPr>
@@ -8758,7 +8915,7 @@
       </p:sp>
       <p:sp>
         <p:nvSpPr>
-          <p:cNvPr id="5" name="Rectangle 4"/>
+          <p:cNvPr id="6" name="Rectangle 5"/>
           <p:cNvSpPr/>
           <p:nvPr/>
         </p:nvSpPr>
@@ -8801,7 +8958,7 @@
       </p:sp>
       <p:sp>
         <p:nvSpPr>
-          <p:cNvPr id="6" name="TextBox 5"/>
+          <p:cNvPr id="7" name="TextBox 6"/>
           <p:cNvSpPr txBox="1"/>
           <p:nvPr/>
         </p:nvSpPr>
@@ -8840,7 +8997,7 @@
       </p:sp>
       <p:sp>
         <p:nvSpPr>
-          <p:cNvPr id="7" name="TextBox 6"/>
+          <p:cNvPr id="8" name="TextBox 7"/>
           <p:cNvSpPr txBox="1"/>
           <p:nvPr/>
         </p:nvSpPr>
@@ -8879,7 +9036,7 @@
       </p:sp>
       <p:sp>
         <p:nvSpPr>
-          <p:cNvPr id="8" name="Rounded Rectangle 7"/>
+          <p:cNvPr id="9" name="Rounded Rectangle 8"/>
           <p:cNvSpPr/>
           <p:nvPr/>
         </p:nvSpPr>
@@ -8955,7 +9112,7 @@
       </p:sp>
       <p:sp>
         <p:nvSpPr>
-          <p:cNvPr id="9" name="Rounded Rectangle 8"/>
+          <p:cNvPr id="10" name="Rounded Rectangle 9"/>
           <p:cNvSpPr/>
           <p:nvPr/>
         </p:nvSpPr>
@@ -9031,7 +9188,7 @@
       </p:sp>
       <p:sp>
         <p:nvSpPr>
-          <p:cNvPr id="10" name="Rounded Rectangle 9"/>
+          <p:cNvPr id="11" name="Rounded Rectangle 10"/>
           <p:cNvSpPr/>
           <p:nvPr/>
         </p:nvSpPr>
@@ -9107,7 +9264,7 @@
       </p:sp>
       <p:sp>
         <p:nvSpPr>
-          <p:cNvPr id="11" name="Rounded Rectangle 10"/>
+          <p:cNvPr id="12" name="Rounded Rectangle 11"/>
           <p:cNvSpPr/>
           <p:nvPr/>
         </p:nvSpPr>
@@ -9183,7 +9340,7 @@
       </p:sp>
       <p:sp>
         <p:nvSpPr>
-          <p:cNvPr id="12" name="Rounded Rectangle 11"/>
+          <p:cNvPr id="13" name="Rounded Rectangle 12"/>
           <p:cNvSpPr/>
           <p:nvPr/>
         </p:nvSpPr>
@@ -9259,7 +9416,7 @@
       </p:sp>
       <p:sp>
         <p:nvSpPr>
-          <p:cNvPr id="13" name="Rounded Rectangle 12"/>
+          <p:cNvPr id="14" name="Rounded Rectangle 13"/>
           <p:cNvSpPr/>
           <p:nvPr/>
         </p:nvSpPr>
@@ -9335,7 +9492,7 @@
       </p:sp>
       <p:sp>
         <p:nvSpPr>
-          <p:cNvPr id="14" name="Rounded Rectangle 13"/>
+          <p:cNvPr id="15" name="Rounded Rectangle 14"/>
           <p:cNvSpPr/>
           <p:nvPr/>
         </p:nvSpPr>
@@ -9413,15 +9570,39 @@
         <p:nvPr/>
       </p:nvGrpSpPr>
       <p:grpSpPr/>
-      <p:sp>
-        <p:nvSpPr>
-          <p:cNvPr id="2" name="TextBox 1"/>
+      <p:pic>
+        <p:nvPicPr>
+          <p:cNvPr id="2" name="Picture 1" descr="presto-logo.png"/>
+          <p:cNvPicPr>
+            <a:picLocks noChangeAspect="1"/>
+          </p:cNvPicPr>
+          <p:nvPr/>
+        </p:nvPicPr>
+        <p:blipFill>
+          <a:blip r:embed="rId2"/>
+          <a:stretch>
+            <a:fillRect/>
+          </a:stretch>
+        </p:blipFill>
+        <p:spPr>
+          <a:xfrm>
+            <a:off x="502920" y="182880"/>
+            <a:ext cx="420624" cy="420624"/>
+          </a:xfrm>
+          <a:prstGeom prst="rect">
+            <a:avLst/>
+          </a:prstGeom>
+        </p:spPr>
+      </p:pic>
+      <p:sp>
+        <p:nvSpPr>
+          <p:cNvPr id="3" name="TextBox 2"/>
           <p:cNvSpPr txBox="1"/>
           <p:nvPr/>
         </p:nvSpPr>
         <p:spPr>
           <a:xfrm>
-            <a:off x="502920" y="301752"/>
+            <a:off x="1024128" y="301752"/>
             <a:ext cx="2743200" cy="228600"/>
           </a:xfrm>
           <a:prstGeom prst="rect">
@@ -9454,7 +9635,7 @@
       </p:sp>
       <p:sp>
         <p:nvSpPr>
-          <p:cNvPr id="3" name="TextBox 2"/>
+          <p:cNvPr id="4" name="TextBox 3"/>
           <p:cNvSpPr txBox="1"/>
           <p:nvPr/>
         </p:nvSpPr>
@@ -9493,7 +9674,7 @@
       </p:sp>
       <p:sp>
         <p:nvSpPr>
-          <p:cNvPr id="4" name="TextBox 3"/>
+          <p:cNvPr id="5" name="TextBox 4"/>
           <p:cNvSpPr txBox="1"/>
           <p:nvPr/>
         </p:nvSpPr>
@@ -9532,7 +9713,7 @@
       </p:sp>
       <p:sp>
         <p:nvSpPr>
-          <p:cNvPr id="5" name="Rectangle 4"/>
+          <p:cNvPr id="6" name="Rectangle 5"/>
           <p:cNvSpPr/>
           <p:nvPr/>
         </p:nvSpPr>
@@ -9575,7 +9756,7 @@
       </p:sp>
       <p:sp>
         <p:nvSpPr>
-          <p:cNvPr id="6" name="TextBox 5"/>
+          <p:cNvPr id="7" name="TextBox 6"/>
           <p:cNvSpPr txBox="1"/>
           <p:nvPr/>
         </p:nvSpPr>
@@ -9614,7 +9795,7 @@
       </p:sp>
       <p:sp>
         <p:nvSpPr>
-          <p:cNvPr id="7" name="TextBox 6"/>
+          <p:cNvPr id="8" name="TextBox 7"/>
           <p:cNvSpPr txBox="1"/>
           <p:nvPr/>
         </p:nvSpPr>
@@ -9653,7 +9834,7 @@
       </p:sp>
       <p:sp>
         <p:nvSpPr>
-          <p:cNvPr id="8" name="Rounded Rectangle 7"/>
+          <p:cNvPr id="9" name="Rounded Rectangle 8"/>
           <p:cNvSpPr/>
           <p:nvPr/>
         </p:nvSpPr>
@@ -9736,7 +9917,7 @@
       </p:sp>
       <p:sp>
         <p:nvSpPr>
-          <p:cNvPr id="9" name="TextBox 8"/>
+          <p:cNvPr id="10" name="TextBox 9"/>
           <p:cNvSpPr txBox="1"/>
           <p:nvPr/>
         </p:nvSpPr>
@@ -9775,7 +9956,7 @@
       </p:sp>
       <p:sp>
         <p:nvSpPr>
-          <p:cNvPr id="10" name="Rounded Rectangle 9"/>
+          <p:cNvPr id="11" name="Rounded Rectangle 10"/>
           <p:cNvSpPr/>
           <p:nvPr/>
         </p:nvSpPr>
@@ -9858,7 +10039,7 @@
       </p:sp>
       <p:sp>
         <p:nvSpPr>
-          <p:cNvPr id="11" name="TextBox 10"/>
+          <p:cNvPr id="12" name="TextBox 11"/>
           <p:cNvSpPr txBox="1"/>
           <p:nvPr/>
         </p:nvSpPr>
@@ -9897,7 +10078,7 @@
       </p:sp>
       <p:sp>
         <p:nvSpPr>
-          <p:cNvPr id="12" name="Rounded Rectangle 11"/>
+          <p:cNvPr id="13" name="Rounded Rectangle 12"/>
           <p:cNvSpPr/>
           <p:nvPr/>
         </p:nvSpPr>
@@ -9980,7 +10161,7 @@
       </p:sp>
       <p:sp>
         <p:nvSpPr>
-          <p:cNvPr id="13" name="TextBox 12"/>
+          <p:cNvPr id="14" name="TextBox 13"/>
           <p:cNvSpPr txBox="1"/>
           <p:nvPr/>
         </p:nvSpPr>
@@ -10019,7 +10200,7 @@
       </p:sp>
       <p:sp>
         <p:nvSpPr>
-          <p:cNvPr id="14" name="Rounded Rectangle 13"/>
+          <p:cNvPr id="15" name="Rounded Rectangle 14"/>
           <p:cNvSpPr/>
           <p:nvPr/>
         </p:nvSpPr>
@@ -10102,7 +10283,7 @@
       </p:sp>
       <p:sp>
         <p:nvSpPr>
-          <p:cNvPr id="15" name="TextBox 14"/>
+          <p:cNvPr id="16" name="TextBox 15"/>
           <p:cNvSpPr txBox="1"/>
           <p:nvPr/>
         </p:nvSpPr>
@@ -10141,7 +10322,7 @@
       </p:sp>
       <p:sp>
         <p:nvSpPr>
-          <p:cNvPr id="16" name="Rounded Rectangle 15"/>
+          <p:cNvPr id="17" name="Rounded Rectangle 16"/>
           <p:cNvSpPr/>
           <p:nvPr/>
         </p:nvSpPr>
@@ -10224,7 +10405,7 @@
       </p:sp>
       <p:sp>
         <p:nvSpPr>
-          <p:cNvPr id="17" name="Rounded Rectangle 16"/>
+          <p:cNvPr id="18" name="Rounded Rectangle 17"/>
           <p:cNvSpPr/>
           <p:nvPr/>
         </p:nvSpPr>
@@ -10302,15 +10483,39 @@
         <p:nvPr/>
       </p:nvGrpSpPr>
       <p:grpSpPr/>
-      <p:sp>
-        <p:nvSpPr>
-          <p:cNvPr id="2" name="TextBox 1"/>
+      <p:pic>
+        <p:nvPicPr>
+          <p:cNvPr id="2" name="Picture 1" descr="presto-logo.png"/>
+          <p:cNvPicPr>
+            <a:picLocks noChangeAspect="1"/>
+          </p:cNvPicPr>
+          <p:nvPr/>
+        </p:nvPicPr>
+        <p:blipFill>
+          <a:blip r:embed="rId2"/>
+          <a:stretch>
+            <a:fillRect/>
+          </a:stretch>
+        </p:blipFill>
+        <p:spPr>
+          <a:xfrm>
+            <a:off x="502920" y="182880"/>
+            <a:ext cx="420624" cy="420624"/>
+          </a:xfrm>
+          <a:prstGeom prst="rect">
+            <a:avLst/>
+          </a:prstGeom>
+        </p:spPr>
+      </p:pic>
+      <p:sp>
+        <p:nvSpPr>
+          <p:cNvPr id="3" name="TextBox 2"/>
           <p:cNvSpPr txBox="1"/>
           <p:nvPr/>
         </p:nvSpPr>
         <p:spPr>
           <a:xfrm>
-            <a:off x="502920" y="301752"/>
+            <a:off x="1024128" y="301752"/>
             <a:ext cx="2743200" cy="228600"/>
           </a:xfrm>
           <a:prstGeom prst="rect">
@@ -10343,7 +10548,7 @@
       </p:sp>
       <p:sp>
         <p:nvSpPr>
-          <p:cNvPr id="3" name="TextBox 2"/>
+          <p:cNvPr id="4" name="TextBox 3"/>
           <p:cNvSpPr txBox="1"/>
           <p:nvPr/>
         </p:nvSpPr>
@@ -10382,7 +10587,7 @@
       </p:sp>
       <p:sp>
         <p:nvSpPr>
-          <p:cNvPr id="4" name="TextBox 3"/>
+          <p:cNvPr id="5" name="TextBox 4"/>
           <p:cNvSpPr txBox="1"/>
           <p:nvPr/>
         </p:nvSpPr>
@@ -10421,7 +10626,7 @@
       </p:sp>
       <p:sp>
         <p:nvSpPr>
-          <p:cNvPr id="5" name="Rectangle 4"/>
+          <p:cNvPr id="6" name="Rectangle 5"/>
           <p:cNvSpPr/>
           <p:nvPr/>
         </p:nvSpPr>
@@ -10464,7 +10669,7 @@
       </p:sp>
       <p:sp>
         <p:nvSpPr>
-          <p:cNvPr id="6" name="TextBox 5"/>
+          <p:cNvPr id="7" name="TextBox 6"/>
           <p:cNvSpPr txBox="1"/>
           <p:nvPr/>
         </p:nvSpPr>
@@ -10503,7 +10708,7 @@
       </p:sp>
       <p:sp>
         <p:nvSpPr>
-          <p:cNvPr id="7" name="TextBox 6"/>
+          <p:cNvPr id="8" name="TextBox 7"/>
           <p:cNvSpPr txBox="1"/>
           <p:nvPr/>
         </p:nvSpPr>
@@ -10542,7 +10747,7 @@
       </p:sp>
       <p:graphicFrame>
         <p:nvGraphicFramePr>
-          <p:cNvPr id="8" name="Table 7"/>
+          <p:cNvPr id="9" name="Table 8"/>
           <p:cNvGraphicFramePr>
             <a:graphicFrameLocks noGrp="1"/>
           </p:cNvGraphicFramePr>
@@ -10844,7 +11049,7 @@
       </p:graphicFrame>
       <p:sp>
         <p:nvSpPr>
-          <p:cNvPr id="9" name="Rounded Rectangle 8"/>
+          <p:cNvPr id="10" name="Rounded Rectangle 9"/>
           <p:cNvSpPr/>
           <p:nvPr/>
         </p:nvSpPr>
@@ -10922,15 +11127,39 @@
         <p:nvPr/>
       </p:nvGrpSpPr>
       <p:grpSpPr/>
-      <p:sp>
-        <p:nvSpPr>
-          <p:cNvPr id="2" name="TextBox 1"/>
+      <p:pic>
+        <p:nvPicPr>
+          <p:cNvPr id="2" name="Picture 1" descr="presto-logo.png"/>
+          <p:cNvPicPr>
+            <a:picLocks noChangeAspect="1"/>
+          </p:cNvPicPr>
+          <p:nvPr/>
+        </p:nvPicPr>
+        <p:blipFill>
+          <a:blip r:embed="rId2"/>
+          <a:stretch>
+            <a:fillRect/>
+          </a:stretch>
+        </p:blipFill>
+        <p:spPr>
+          <a:xfrm>
+            <a:off x="502920" y="182880"/>
+            <a:ext cx="420624" cy="420624"/>
+          </a:xfrm>
+          <a:prstGeom prst="rect">
+            <a:avLst/>
+          </a:prstGeom>
+        </p:spPr>
+      </p:pic>
+      <p:sp>
+        <p:nvSpPr>
+          <p:cNvPr id="3" name="TextBox 2"/>
           <p:cNvSpPr txBox="1"/>
           <p:nvPr/>
         </p:nvSpPr>
         <p:spPr>
           <a:xfrm>
-            <a:off x="502920" y="301752"/>
+            <a:off x="1024128" y="301752"/>
             <a:ext cx="2743200" cy="228600"/>
           </a:xfrm>
           <a:prstGeom prst="rect">
@@ -10963,7 +11192,7 @@
       </p:sp>
       <p:sp>
         <p:nvSpPr>
-          <p:cNvPr id="3" name="TextBox 2"/>
+          <p:cNvPr id="4" name="TextBox 3"/>
           <p:cNvSpPr txBox="1"/>
           <p:nvPr/>
         </p:nvSpPr>
@@ -11002,7 +11231,7 @@
       </p:sp>
       <p:sp>
         <p:nvSpPr>
-          <p:cNvPr id="4" name="TextBox 3"/>
+          <p:cNvPr id="5" name="TextBox 4"/>
           <p:cNvSpPr txBox="1"/>
           <p:nvPr/>
         </p:nvSpPr>
@@ -11041,7 +11270,7 @@
       </p:sp>
       <p:sp>
         <p:nvSpPr>
-          <p:cNvPr id="5" name="Rectangle 4"/>
+          <p:cNvPr id="6" name="Rectangle 5"/>
           <p:cNvSpPr/>
           <p:nvPr/>
         </p:nvSpPr>
@@ -11084,7 +11313,7 @@
       </p:sp>
       <p:sp>
         <p:nvSpPr>
-          <p:cNvPr id="6" name="TextBox 5"/>
+          <p:cNvPr id="7" name="TextBox 6"/>
           <p:cNvSpPr txBox="1"/>
           <p:nvPr/>
         </p:nvSpPr>
@@ -11123,7 +11352,7 @@
       </p:sp>
       <p:sp>
         <p:nvSpPr>
-          <p:cNvPr id="7" name="TextBox 6"/>
+          <p:cNvPr id="8" name="TextBox 7"/>
           <p:cNvSpPr txBox="1"/>
           <p:nvPr/>
         </p:nvSpPr>
@@ -11162,7 +11391,7 @@
       </p:sp>
       <p:sp>
         <p:nvSpPr>
-          <p:cNvPr id="8" name="Rounded Rectangle 7"/>
+          <p:cNvPr id="9" name="Rounded Rectangle 8"/>
           <p:cNvSpPr/>
           <p:nvPr/>
         </p:nvSpPr>
@@ -11238,7 +11467,7 @@
       </p:sp>
       <p:sp>
         <p:nvSpPr>
-          <p:cNvPr id="9" name="Rounded Rectangle 8"/>
+          <p:cNvPr id="10" name="Rounded Rectangle 9"/>
           <p:cNvSpPr/>
           <p:nvPr/>
         </p:nvSpPr>
@@ -11314,7 +11543,7 @@
       </p:sp>
       <p:sp>
         <p:nvSpPr>
-          <p:cNvPr id="10" name="Rounded Rectangle 9"/>
+          <p:cNvPr id="11" name="Rounded Rectangle 10"/>
           <p:cNvSpPr/>
           <p:nvPr/>
         </p:nvSpPr>
@@ -11390,7 +11619,7 @@
       </p:sp>
       <p:sp>
         <p:nvSpPr>
-          <p:cNvPr id="11" name="Rounded Rectangle 10"/>
+          <p:cNvPr id="12" name="Rounded Rectangle 11"/>
           <p:cNvSpPr/>
           <p:nvPr/>
         </p:nvSpPr>
@@ -11466,7 +11695,7 @@
       </p:sp>
       <p:sp>
         <p:nvSpPr>
-          <p:cNvPr id="12" name="Rounded Rectangle 11"/>
+          <p:cNvPr id="13" name="Rounded Rectangle 12"/>
           <p:cNvSpPr/>
           <p:nvPr/>
         </p:nvSpPr>
@@ -11544,15 +11773,39 @@
         <p:nvPr/>
       </p:nvGrpSpPr>
       <p:grpSpPr/>
-      <p:sp>
-        <p:nvSpPr>
-          <p:cNvPr id="2" name="TextBox 1"/>
+      <p:pic>
+        <p:nvPicPr>
+          <p:cNvPr id="2" name="Picture 1" descr="presto-logo.png"/>
+          <p:cNvPicPr>
+            <a:picLocks noChangeAspect="1"/>
+          </p:cNvPicPr>
+          <p:nvPr/>
+        </p:nvPicPr>
+        <p:blipFill>
+          <a:blip r:embed="rId2"/>
+          <a:stretch>
+            <a:fillRect/>
+          </a:stretch>
+        </p:blipFill>
+        <p:spPr>
+          <a:xfrm>
+            <a:off x="502920" y="182880"/>
+            <a:ext cx="420624" cy="420624"/>
+          </a:xfrm>
+          <a:prstGeom prst="rect">
+            <a:avLst/>
+          </a:prstGeom>
+        </p:spPr>
+      </p:pic>
+      <p:sp>
+        <p:nvSpPr>
+          <p:cNvPr id="3" name="TextBox 2"/>
           <p:cNvSpPr txBox="1"/>
           <p:nvPr/>
         </p:nvSpPr>
         <p:spPr>
           <a:xfrm>
-            <a:off x="502920" y="301752"/>
+            <a:off x="1024128" y="301752"/>
             <a:ext cx="2743200" cy="228600"/>
           </a:xfrm>
           <a:prstGeom prst="rect">
@@ -11585,7 +11838,7 @@
       </p:sp>
       <p:sp>
         <p:nvSpPr>
-          <p:cNvPr id="3" name="TextBox 2"/>
+          <p:cNvPr id="4" name="TextBox 3"/>
           <p:cNvSpPr txBox="1"/>
           <p:nvPr/>
         </p:nvSpPr>
@@ -11624,7 +11877,7 @@
       </p:sp>
       <p:sp>
         <p:nvSpPr>
-          <p:cNvPr id="4" name="TextBox 3"/>
+          <p:cNvPr id="5" name="TextBox 4"/>
           <p:cNvSpPr txBox="1"/>
           <p:nvPr/>
         </p:nvSpPr>
@@ -11663,7 +11916,7 @@
       </p:sp>
       <p:sp>
         <p:nvSpPr>
-          <p:cNvPr id="5" name="Rectangle 4"/>
+          <p:cNvPr id="6" name="Rectangle 5"/>
           <p:cNvSpPr/>
           <p:nvPr/>
         </p:nvSpPr>
@@ -11706,7 +11959,7 @@
       </p:sp>
       <p:sp>
         <p:nvSpPr>
-          <p:cNvPr id="6" name="TextBox 5"/>
+          <p:cNvPr id="7" name="TextBox 6"/>
           <p:cNvSpPr txBox="1"/>
           <p:nvPr/>
         </p:nvSpPr>
@@ -11745,7 +11998,7 @@
       </p:sp>
       <p:sp>
         <p:nvSpPr>
-          <p:cNvPr id="7" name="TextBox 6"/>
+          <p:cNvPr id="8" name="TextBox 7"/>
           <p:cNvSpPr txBox="1"/>
           <p:nvPr/>
         </p:nvSpPr>
@@ -11784,7 +12037,7 @@
       </p:sp>
       <p:sp>
         <p:nvSpPr>
-          <p:cNvPr id="8" name="Rounded Rectangle 7"/>
+          <p:cNvPr id="9" name="Rounded Rectangle 8"/>
           <p:cNvSpPr/>
           <p:nvPr/>
         </p:nvSpPr>
@@ -11860,7 +12113,7 @@
       </p:sp>
       <p:sp>
         <p:nvSpPr>
-          <p:cNvPr id="9" name="Rounded Rectangle 8"/>
+          <p:cNvPr id="10" name="Rounded Rectangle 9"/>
           <p:cNvSpPr/>
           <p:nvPr/>
         </p:nvSpPr>
@@ -11936,7 +12189,7 @@
       </p:sp>
       <p:sp>
         <p:nvSpPr>
-          <p:cNvPr id="10" name="Rounded Rectangle 9"/>
+          <p:cNvPr id="11" name="Rounded Rectangle 10"/>
           <p:cNvSpPr/>
           <p:nvPr/>
         </p:nvSpPr>
@@ -12012,7 +12265,7 @@
       </p:sp>
       <p:sp>
         <p:nvSpPr>
-          <p:cNvPr id="11" name="Rounded Rectangle 10"/>
+          <p:cNvPr id="12" name="Rounded Rectangle 11"/>
           <p:cNvSpPr/>
           <p:nvPr/>
         </p:nvSpPr>
